--- a/CLIMADACOL.pptx
+++ b/CLIMADACOL.pptx
@@ -1431,8 +1431,8 @@
         </p:nvSpPr>
         <p:spPr>
           <a:xfrm>
-            <a:off x="1143225" y="685800"/>
-            <a:ext cx="4572225" cy="3429000"/>
+            <a:off x="381000" y="685800"/>
+            <a:ext cx="6096000" cy="3429000"/>
           </a:xfrm>
           <a:custGeom>
             <a:avLst/>
@@ -15852,6 +15852,47 @@
           </a:p>
         </p:txBody>
       </p:sp>
+      <p:sp>
+        <p:nvSpPr>
+          <p:cNvPr id="3" name="CuadroTexto 2">
+            <a:extLst>
+              <a:ext uri="{FF2B5EF4-FFF2-40B4-BE49-F238E27FC236}">
+                <a16:creationId xmlns:a16="http://schemas.microsoft.com/office/drawing/2014/main" id="{5B1864F0-3A82-684E-255A-B9D3F1F137E7}"/>
+              </a:ext>
+            </a:extLst>
+          </p:cNvPr>
+          <p:cNvSpPr txBox="1"/>
+          <p:nvPr/>
+        </p:nvSpPr>
+        <p:spPr>
+          <a:xfrm>
+            <a:off x="880110" y="5821857"/>
+            <a:ext cx="3893058" cy="307777"/>
+          </a:xfrm>
+          <a:prstGeom prst="rect">
+            <a:avLst/>
+          </a:prstGeom>
+          <a:noFill/>
+        </p:spPr>
+        <p:txBody>
+          <a:bodyPr wrap="square">
+            <a:spAutoFit/>
+          </a:bodyPr>
+          <a:lstStyle/>
+          <a:p>
+            <a:r>
+              <a:rPr lang="es-CO" dirty="0">
+                <a:hlinkClick r:id="rId5"/>
+              </a:rPr>
+              <a:t>https://github.com/waleonr/CLIMADACOL</a:t>
+            </a:r>
+            <a:r>
+              <a:rPr lang="es-CO" dirty="0"/>
+              <a:t> </a:t>
+            </a:r>
+          </a:p>
+        </p:txBody>
+      </p:sp>
     </p:spTree>
   </p:cSld>
   <p:clrMapOvr>
